--- a/teaching_ppt/Ch1_概述.pptx
+++ b/teaching_ppt/Ch1_概述.pptx
@@ -130,14 +130,14 @@
   <p:extLst>
     <p:ext uri="{521415D9-36F7-43E2-AB2F-B90AF26B5E84}">
       <p14:sectionLst xmlns:p14="http://schemas.microsoft.com/office/powerpoint/2010/main">
-        <p14:section name="封面与导学 Opening" id="{37c7bbe0-a6dc-8405-ac30-68d1d635a567}">
+        <p14:section name="封面与导学 Opening" id="{86cd75bd-c88e-a809-e20e-0e9e010aec0b}">
           <p14:sldIdLst>
             <p14:sldId id="256"/>
             <p14:sldId id="257"/>
             <p14:sldId id="258"/>
           </p14:sldIdLst>
         </p14:section>
-        <p14:section name="1.1 5G-6G标准演进 Standards Evolution" id="{a060e7de-f2ea-844d-39e6-f395d9ce60c1}">
+        <p14:section name="1.1 5G-6G标准演进 Standards Evolution" id="{a935427b-d4f8-e10e-14c0-7c1cac03e253}">
           <p14:sldIdLst>
             <p14:sldId id="259"/>
             <p14:sldId id="260"/>
@@ -151,7 +151,7 @@
             <p14:sldId id="268"/>
           </p14:sldIdLst>
         </p14:section>
-        <p14:section name="1.2 移动通信前沿技术简介 Frontier Technologies" id="{3c595b33-13be-5419-5d44-e436791af11c}">
+        <p14:section name="1.2 移动通信前沿技术简介 Frontier Technologies" id="{824379de-c607-557d-d452-fed1e8934565}">
           <p14:sldIdLst>
             <p14:sldId id="269"/>
             <p14:sldId id="270"/>
@@ -162,7 +162,7 @@
             <p14:sldId id="275"/>
           </p14:sldIdLst>
         </p14:section>
-        <p14:section name="总结 Wrap-up" id="{21ea2c9d-cec2-54f3-99a1-b4a2ae2b81c5}">
+        <p14:section name="总结 Wrap-up" id="{ac823724-5d77-ebff-28ae-6f500cdc36bb}">
           <p14:sldIdLst>
             <p14:sldId id="276"/>
             <p14:sldId id="277"/>
@@ -212,30 +212,6 @@
             <a:effectLst/>
           </c:spPr>
           <c:invertIfNegative val="0"/>
-          <c:dLbls>
-            <c:numFmt formatCode="#,##0" sourceLinked="0"/>
-            <c:txPr>
-              <a:bodyPr/>
-              <a:lstStyle/>
-              <a:p>
-                <a:pPr>
-                  <a:defRPr b="0" i="0" strike="noStrike" sz="1200" u="none">
-                    <a:solidFill>
-                      <a:srgbClr val="000000"/>
-                    </a:solidFill>
-                    <a:latin typeface="Arial"/>
-                  </a:defRPr>
-                </a:pPr>
-              </a:p>
-            </c:txPr>
-            <c:showLegendKey val="0"/>
-            <c:showVal val="0"/>
-            <c:showCatName val="0"/>
-            <c:showSerName val="0"/>
-            <c:showPercent val="0"/>
-            <c:showBubbleSize val="0"/>
-            <c:showLeaderLines val="0"/>
-          </c:dLbls>
           <c:dPt>
             <c:idx val="0"/>
             <c:invertIfNegative val="0"/>
@@ -280,6 +256,30 @@
               <a:effectLst/>
             </c:spPr>
           </c:dPt>
+          <c:dLbls>
+            <c:numFmt formatCode="#,##0" sourceLinked="0"/>
+            <c:txPr>
+              <a:bodyPr/>
+              <a:lstStyle/>
+              <a:p>
+                <a:pPr>
+                  <a:defRPr b="0" i="0" strike="noStrike" sz="1200" u="none">
+                    <a:solidFill>
+                      <a:srgbClr val="000000"/>
+                    </a:solidFill>
+                    <a:latin typeface="Arial"/>
+                  </a:defRPr>
+                </a:pPr>
+              </a:p>
+            </c:txPr>
+            <c:showLegendKey val="0"/>
+            <c:showVal val="0"/>
+            <c:showCatName val="0"/>
+            <c:showSerName val="0"/>
+            <c:showPercent val="0"/>
+            <c:showBubbleSize val="0"/>
+            <c:showLeaderLines val="0"/>
+          </c:dLbls>
           <c:cat>
             <c:multiLvlStrRef>
               <c:f>Sheet1!$A$2:$A$5</c:f>
@@ -352,7 +352,6 @@
         <c:overlap val="0"/>
         <c:axId val="2094734554"/>
         <c:axId val="2094734552"/>
-        <c:axId val="2094734556"/>
       </c:barChart>
       <c:catAx>
         <c:axId val="2094734554"/>
